--- a/docs/exposiciones/2026-06-10_Custodio_Para_Profesores/Custodio_Para_Profesores_Ley21719.pptx
+++ b/docs/exposiciones/2026-06-10_Custodio_Para_Profesores/Custodio_Para_Profesores_Ley21719.pptx
@@ -4416,7 +4416,7 @@
                 </a:solidFill>
                 <a:latin typeface="Calibri"/>
               </a:rPr>
-              <a:t>  •  Ley 21.719 (feb. 2023):取代 la antigua Ley 19.628 sobre protección de datos personales en Chile.</a:t>
+              <a:t>  •  Ley 21.719 (feb. 2023): reemplaza la antigua Ley 19.628 sobre protección de datos personales en Chile.</a:t>
             </a:r>
           </a:p>
         </p:txBody>
